--- a/26Q1/TSM-台积电-26Q1财报.pptx
+++ b/26Q1/TSM-台积电-26Q1财报.pptx
@@ -556,7 +556,7 @@
                     <c:v>5nm (N5/N4)</c:v>
                   </c:pt>
                   <c:pt idx="2">
-                    <c:v>7nm及以下其他</c:v>
+                    <c:v>7nm</c:v>
                   </c:pt>
                   <c:pt idx="3">
                     <c:v>成熟制程 (&gt;7nm)</c:v>
@@ -578,10 +578,10 @@
                   <c:v>36</c:v>
                 </c:pt>
                 <c:pt idx="2">
-                  <c:v>0</c:v>
+                  <c:v>13</c:v>
                 </c:pt>
                 <c:pt idx="3">
-                  <c:v>39</c:v>
+                  <c:v>26</c:v>
                 </c:pt>
               </c:numCache>
             </c:numRef>
@@ -949,34 +949,34 @@
                 <c:formatCode>General</c:formatCode>
                 <c:ptCount val="10"/>
                 <c:pt idx="0">
-                  <c:v>29.4</c:v>
+                  <c:v>29.22</c:v>
                 </c:pt>
                 <c:pt idx="1">
-                  <c:v>30.4</c:v>
+                  <c:v>32.96</c:v>
                 </c:pt>
                 <c:pt idx="2">
-                  <c:v>34.1</c:v>
+                  <c:v>33.75</c:v>
                 </c:pt>
                 <c:pt idx="3">
-                  <c:v>35.7</c:v>
+                  <c:v>35.57</c:v>
                 </c:pt>
                 <c:pt idx="4">
-                  <c:v>47.4</c:v>
+                  <c:v>47.71</c:v>
                 </c:pt>
                 <c:pt idx="5">
-                  <c:v>56.8</c:v>
+                  <c:v>57.39</c:v>
                 </c:pt>
                 <c:pt idx="6">
-                  <c:v>75.9</c:v>
+                  <c:v>73.86</c:v>
                 </c:pt>
                 <c:pt idx="7">
-                  <c:v>70.4</c:v>
+                  <c:v>70.45</c:v>
                 </c:pt>
                 <c:pt idx="8">
-                  <c:v>88.3</c:v>
+                  <c:v>88.34</c:v>
                 </c:pt>
                 <c:pt idx="9">
-                  <c:v>122.3</c:v>
+                  <c:v>121.91</c:v>
                 </c:pt>
               </c:numCache>
             </c:numRef>
@@ -4595,7 +4595,7 @@
         </p:nvSpPr>
         <p:spPr>
           <a:xfrm>
-            <a:off x="7635240" y="1051560"/>
+            <a:off x="7635240" y="978408"/>
             <a:ext cx="1188720" cy="256032"/>
           </a:xfrm>
           <a:prstGeom prst="rect">
@@ -4612,7 +4612,7 @@
               <a:buNone/>
             </a:pPr>
             <a:r>
-              <a:rPr lang="en-US" sz="1100" b="1" dirty="0">
+              <a:rPr lang="en-US" sz="1000" b="1" dirty="0">
                 <a:solidFill>
                   <a:srgbClr val="22C55E"/>
                 </a:solidFill>
@@ -4622,13 +4622,52 @@
               </a:rPr>
               <a:t>环比 +20%</a:t>
             </a:r>
-            <a:endParaRPr lang="en-US" sz="1100" dirty="0"/>
+            <a:endParaRPr lang="en-US" sz="1000" dirty="0"/>
           </a:p>
         </p:txBody>
       </p:sp>
       <p:sp>
         <p:nvSpPr>
           <p:cNvPr id="11" name="Text 8"/>
+          <p:cNvSpPr/>
+          <p:nvPr/>
+        </p:nvSpPr>
+        <p:spPr>
+          <a:xfrm>
+            <a:off x="7635240" y="1252728"/>
+            <a:ext cx="1188720" cy="256032"/>
+          </a:xfrm>
+          <a:prstGeom prst="rect">
+            <a:avLst/>
+          </a:prstGeom>
+          <a:noFill/>
+          <a:ln/>
+        </p:spPr>
+        <p:txBody>
+          <a:bodyPr wrap="square" lIns="0" tIns="0" rIns="0" bIns="0" rtlCol="0" anchor="ctr"/>
+          <a:lstStyle/>
+          <a:p>
+            <a:pPr indent="0" marL="0">
+              <a:buNone/>
+            </a:pPr>
+            <a:r>
+              <a:rPr lang="en-US" sz="1000" dirty="0">
+                <a:solidFill>
+                  <a:srgbClr val="94A3B8"/>
+                </a:solidFill>
+                <a:latin typeface="Arial" pitchFamily="34" charset="0"/>
+                <a:ea typeface="Arial" pitchFamily="34" charset="-122"/>
+                <a:cs typeface="Arial" pitchFamily="34" charset="-120"/>
+              </a:rPr>
+              <a:t>同比 +46.0%</a:t>
+            </a:r>
+            <a:endParaRPr lang="en-US" sz="1000" dirty="0"/>
+          </a:p>
+        </p:txBody>
+      </p:sp>
+      <p:sp>
+        <p:nvSpPr>
+          <p:cNvPr id="12" name="Text 9"/>
           <p:cNvSpPr/>
           <p:nvPr/>
         </p:nvSpPr>
@@ -4667,7 +4706,7 @@
       </p:sp>
       <p:sp>
         <p:nvSpPr>
-          <p:cNvPr id="12" name="Shape 9"/>
+          <p:cNvPr id="13" name="Shape 10"/>
           <p:cNvSpPr/>
           <p:nvPr/>
         </p:nvSpPr>
@@ -4699,7 +4738,7 @@
       </p:sp>
       <p:sp>
         <p:nvSpPr>
-          <p:cNvPr id="13" name="Shape 10"/>
+          <p:cNvPr id="14" name="Shape 11"/>
           <p:cNvSpPr/>
           <p:nvPr/>
         </p:nvSpPr>
@@ -4724,7 +4763,7 @@
       </p:sp>
       <p:sp>
         <p:nvSpPr>
-          <p:cNvPr id="14" name="Text 11"/>
+          <p:cNvPr id="15" name="Text 12"/>
           <p:cNvSpPr/>
           <p:nvPr/>
         </p:nvSpPr>
@@ -4763,7 +4802,7 @@
       </p:sp>
       <p:sp>
         <p:nvSpPr>
-          <p:cNvPr id="15" name="Text 12"/>
+          <p:cNvPr id="16" name="Text 13"/>
           <p:cNvSpPr/>
           <p:nvPr/>
         </p:nvSpPr>
@@ -4802,13 +4841,13 @@
       </p:sp>
       <p:sp>
         <p:nvSpPr>
-          <p:cNvPr id="16" name="Text 13"/>
-          <p:cNvSpPr/>
-          <p:nvPr/>
-        </p:nvSpPr>
-        <p:spPr>
-          <a:xfrm>
-            <a:off x="7635240" y="2039112"/>
+          <p:cNvPr id="17" name="Text 14"/>
+          <p:cNvSpPr/>
+          <p:nvPr/>
+        </p:nvSpPr>
+        <p:spPr>
+          <a:xfrm>
+            <a:off x="7635240" y="1965960"/>
             <a:ext cx="1188720" cy="256032"/>
           </a:xfrm>
           <a:prstGeom prst="rect">
@@ -4825,7 +4864,7 @@
               <a:buNone/>
             </a:pPr>
             <a:r>
-              <a:rPr lang="en-US" sz="1100" b="1" dirty="0">
+              <a:rPr lang="en-US" sz="1000" b="1" dirty="0">
                 <a:solidFill>
                   <a:srgbClr val="EF4444"/>
                 </a:solidFill>
@@ -4835,13 +4874,52 @@
               </a:rPr>
               <a:t>环比 -11%</a:t>
             </a:r>
-            <a:endParaRPr lang="en-US" sz="1100" dirty="0"/>
-          </a:p>
-        </p:txBody>
-      </p:sp>
-      <p:sp>
-        <p:nvSpPr>
-          <p:cNvPr id="17" name="Text 14"/>
+            <a:endParaRPr lang="en-US" sz="1000" dirty="0"/>
+          </a:p>
+        </p:txBody>
+      </p:sp>
+      <p:sp>
+        <p:nvSpPr>
+          <p:cNvPr id="18" name="Text 15"/>
+          <p:cNvSpPr/>
+          <p:nvPr/>
+        </p:nvSpPr>
+        <p:spPr>
+          <a:xfrm>
+            <a:off x="7635240" y="2240280"/>
+            <a:ext cx="1188720" cy="256032"/>
+          </a:xfrm>
+          <a:prstGeom prst="rect">
+            <a:avLst/>
+          </a:prstGeom>
+          <a:noFill/>
+          <a:ln/>
+        </p:spPr>
+        <p:txBody>
+          <a:bodyPr wrap="square" lIns="0" tIns="0" rIns="0" bIns="0" rtlCol="0" anchor="ctr"/>
+          <a:lstStyle/>
+          <a:p>
+            <a:pPr indent="0" marL="0">
+              <a:buNone/>
+            </a:pPr>
+            <a:r>
+              <a:rPr lang="en-US" sz="1000" dirty="0">
+                <a:solidFill>
+                  <a:srgbClr val="94A3B8"/>
+                </a:solidFill>
+                <a:latin typeface="Arial" pitchFamily="34" charset="0"/>
+                <a:ea typeface="Arial" pitchFamily="34" charset="-122"/>
+                <a:cs typeface="Arial" pitchFamily="34" charset="-120"/>
+              </a:rPr>
+              <a:t>同比 +31.0%</a:t>
+            </a:r>
+            <a:endParaRPr lang="en-US" sz="1000" dirty="0"/>
+          </a:p>
+        </p:txBody>
+      </p:sp>
+      <p:sp>
+        <p:nvSpPr>
+          <p:cNvPr id="19" name="Text 16"/>
           <p:cNvSpPr/>
           <p:nvPr/>
         </p:nvSpPr>
@@ -4880,7 +4958,7 @@
       </p:sp>
       <p:sp>
         <p:nvSpPr>
-          <p:cNvPr id="18" name="Shape 15"/>
+          <p:cNvPr id="20" name="Shape 17"/>
           <p:cNvSpPr/>
           <p:nvPr/>
         </p:nvSpPr>
@@ -4912,7 +4990,7 @@
       </p:sp>
       <p:sp>
         <p:nvSpPr>
-          <p:cNvPr id="19" name="Shape 16"/>
+          <p:cNvPr id="21" name="Shape 18"/>
           <p:cNvSpPr/>
           <p:nvPr/>
         </p:nvSpPr>
@@ -4937,7 +5015,7 @@
       </p:sp>
       <p:sp>
         <p:nvSpPr>
-          <p:cNvPr id="20" name="Text 17"/>
+          <p:cNvPr id="22" name="Text 19"/>
           <p:cNvSpPr/>
           <p:nvPr/>
         </p:nvSpPr>
@@ -4976,7 +5054,7 @@
       </p:sp>
       <p:sp>
         <p:nvSpPr>
-          <p:cNvPr id="21" name="Text 18"/>
+          <p:cNvPr id="23" name="Text 20"/>
           <p:cNvSpPr/>
           <p:nvPr/>
         </p:nvSpPr>
@@ -5015,13 +5093,13 @@
       </p:sp>
       <p:sp>
         <p:nvSpPr>
-          <p:cNvPr id="22" name="Text 19"/>
-          <p:cNvSpPr/>
-          <p:nvPr/>
-        </p:nvSpPr>
-        <p:spPr>
-          <a:xfrm>
-            <a:off x="7635240" y="3026664"/>
+          <p:cNvPr id="24" name="Text 21"/>
+          <p:cNvSpPr/>
+          <p:nvPr/>
+        </p:nvSpPr>
+        <p:spPr>
+          <a:xfrm>
+            <a:off x="7635240" y="2953512"/>
             <a:ext cx="1188720" cy="256032"/>
           </a:xfrm>
           <a:prstGeom prst="rect">
@@ -5038,7 +5116,7 @@
               <a:buNone/>
             </a:pPr>
             <a:r>
-              <a:rPr lang="en-US" sz="1100" b="1" dirty="0">
+              <a:rPr lang="en-US" sz="1000" b="1" dirty="0">
                 <a:solidFill>
                   <a:srgbClr val="22C55E"/>
                 </a:solidFill>
@@ -5048,13 +5126,52 @@
               </a:rPr>
               <a:t>环比 +12%</a:t>
             </a:r>
-            <a:endParaRPr lang="en-US" sz="1100" dirty="0"/>
-          </a:p>
-        </p:txBody>
-      </p:sp>
-      <p:sp>
-        <p:nvSpPr>
-          <p:cNvPr id="23" name="Text 20"/>
+            <a:endParaRPr lang="en-US" sz="1000" dirty="0"/>
+          </a:p>
+        </p:txBody>
+      </p:sp>
+      <p:sp>
+        <p:nvSpPr>
+          <p:cNvPr id="25" name="Text 22"/>
+          <p:cNvSpPr/>
+          <p:nvPr/>
+        </p:nvSpPr>
+        <p:spPr>
+          <a:xfrm>
+            <a:off x="7635240" y="3227832"/>
+            <a:ext cx="1188720" cy="256032"/>
+          </a:xfrm>
+          <a:prstGeom prst="rect">
+            <a:avLst/>
+          </a:prstGeom>
+          <a:noFill/>
+          <a:ln/>
+        </p:spPr>
+        <p:txBody>
+          <a:bodyPr wrap="square" lIns="0" tIns="0" rIns="0" bIns="0" rtlCol="0" anchor="ctr"/>
+          <a:lstStyle/>
+          <a:p>
+            <a:pPr indent="0" marL="0">
+              <a:buNone/>
+            </a:pPr>
+            <a:r>
+              <a:rPr lang="en-US" sz="1000" dirty="0">
+                <a:solidFill>
+                  <a:srgbClr val="94A3B8"/>
+                </a:solidFill>
+                <a:latin typeface="Arial" pitchFamily="34" charset="0"/>
+                <a:ea typeface="Arial" pitchFamily="34" charset="-122"/>
+                <a:cs typeface="Arial" pitchFamily="34" charset="-120"/>
+              </a:rPr>
+              <a:t>同比 +69.2%</a:t>
+            </a:r>
+            <a:endParaRPr lang="en-US" sz="1000" dirty="0"/>
+          </a:p>
+        </p:txBody>
+      </p:sp>
+      <p:sp>
+        <p:nvSpPr>
+          <p:cNvPr id="26" name="Text 23"/>
           <p:cNvSpPr/>
           <p:nvPr/>
         </p:nvSpPr>
@@ -5093,7 +5210,7 @@
       </p:sp>
       <p:sp>
         <p:nvSpPr>
-          <p:cNvPr id="24" name="Shape 21"/>
+          <p:cNvPr id="27" name="Shape 24"/>
           <p:cNvSpPr/>
           <p:nvPr/>
         </p:nvSpPr>
@@ -5125,7 +5242,7 @@
       </p:sp>
       <p:sp>
         <p:nvSpPr>
-          <p:cNvPr id="25" name="Shape 22"/>
+          <p:cNvPr id="28" name="Shape 25"/>
           <p:cNvSpPr/>
           <p:nvPr/>
         </p:nvSpPr>
@@ -5150,7 +5267,7 @@
       </p:sp>
       <p:sp>
         <p:nvSpPr>
-          <p:cNvPr id="26" name="Text 23"/>
+          <p:cNvPr id="29" name="Text 26"/>
           <p:cNvSpPr/>
           <p:nvPr/>
         </p:nvSpPr>
@@ -5189,7 +5306,7 @@
       </p:sp>
       <p:sp>
         <p:nvSpPr>
-          <p:cNvPr id="27" name="Text 24"/>
+          <p:cNvPr id="30" name="Text 27"/>
           <p:cNvSpPr/>
           <p:nvPr/>
         </p:nvSpPr>
@@ -5228,13 +5345,13 @@
       </p:sp>
       <p:sp>
         <p:nvSpPr>
-          <p:cNvPr id="28" name="Text 25"/>
-          <p:cNvSpPr/>
-          <p:nvPr/>
-        </p:nvSpPr>
-        <p:spPr>
-          <a:xfrm>
-            <a:off x="7635240" y="4014216"/>
+          <p:cNvPr id="31" name="Text 28"/>
+          <p:cNvSpPr/>
+          <p:nvPr/>
+        </p:nvSpPr>
+        <p:spPr>
+          <a:xfrm>
+            <a:off x="7635240" y="3941064"/>
             <a:ext cx="1188720" cy="256032"/>
           </a:xfrm>
           <a:prstGeom prst="rect">
@@ -5251,7 +5368,7 @@
               <a:buNone/>
             </a:pPr>
             <a:r>
-              <a:rPr lang="en-US" sz="1100" b="1" dirty="0">
+              <a:rPr lang="en-US" sz="1000" b="1" dirty="0">
                 <a:solidFill>
                   <a:srgbClr val="EF4444"/>
                 </a:solidFill>
@@ -5261,13 +5378,52 @@
               </a:rPr>
               <a:t>环比 -7%</a:t>
             </a:r>
-            <a:endParaRPr lang="en-US" sz="1100" dirty="0"/>
-          </a:p>
-        </p:txBody>
-      </p:sp>
-      <p:sp>
-        <p:nvSpPr>
-          <p:cNvPr id="29" name="Text 26"/>
+            <a:endParaRPr lang="en-US" sz="1000" dirty="0"/>
+          </a:p>
+        </p:txBody>
+      </p:sp>
+      <p:sp>
+        <p:nvSpPr>
+          <p:cNvPr id="32" name="Text 29"/>
+          <p:cNvSpPr/>
+          <p:nvPr/>
+        </p:nvSpPr>
+        <p:spPr>
+          <a:xfrm>
+            <a:off x="7635240" y="4215384"/>
+            <a:ext cx="1188720" cy="256032"/>
+          </a:xfrm>
+          <a:prstGeom prst="rect">
+            <a:avLst/>
+          </a:prstGeom>
+          <a:noFill/>
+          <a:ln/>
+        </p:spPr>
+        <p:txBody>
+          <a:bodyPr wrap="square" lIns="0" tIns="0" rIns="0" bIns="0" rtlCol="0" anchor="ctr"/>
+          <a:lstStyle/>
+          <a:p>
+            <a:pPr indent="0" marL="0">
+              <a:buNone/>
+            </a:pPr>
+            <a:r>
+              <a:rPr lang="en-US" sz="1000" dirty="0">
+                <a:solidFill>
+                  <a:srgbClr val="94A3B8"/>
+                </a:solidFill>
+                <a:latin typeface="Arial" pitchFamily="34" charset="0"/>
+                <a:ea typeface="Arial" pitchFamily="34" charset="-122"/>
+                <a:cs typeface="Arial" pitchFamily="34" charset="-120"/>
+              </a:rPr>
+              <a:t>同比 +7.7%</a:t>
+            </a:r>
+            <a:endParaRPr lang="en-US" sz="1000" dirty="0"/>
+          </a:p>
+        </p:txBody>
+      </p:sp>
+      <p:sp>
+        <p:nvSpPr>
+          <p:cNvPr id="33" name="Text 30"/>
           <p:cNvSpPr/>
           <p:nvPr/>
         </p:nvSpPr>
@@ -5850,11 +6006,11 @@
             <a:avLst/>
           </a:prstGeom>
           <a:solidFill>
-            <a:srgbClr val="6366F1"/>
+            <a:srgbClr val="94A3B8"/>
           </a:solidFill>
           <a:ln w="12700">
             <a:solidFill>
-              <a:srgbClr val="6366F1"/>
+              <a:srgbClr val="94A3B8"/>
             </a:solidFill>
             <a:prstDash val="solid"/>
           </a:ln>
@@ -5893,7 +6049,7 @@
                 <a:ea typeface="Arial" pitchFamily="34" charset="-122"/>
                 <a:cs typeface="Arial" pitchFamily="34" charset="-120"/>
               </a:rPr>
-              <a:t>先进制程合计（≤7nm）</a:t>
+              <a:t>7nm</a:t>
             </a:r>
             <a:endParaRPr lang="en-US" sz="1100" dirty="0"/>
           </a:p>
@@ -5926,13 +6082,13 @@
             <a:r>
               <a:rPr lang="en-US" sz="2000" b="1" dirty="0">
                 <a:solidFill>
-                  <a:srgbClr val="6366F1"/>
-                </a:solidFill>
-                <a:latin typeface="Arial" pitchFamily="34" charset="0"/>
-                <a:ea typeface="Arial" pitchFamily="34" charset="-122"/>
-                <a:cs typeface="Arial" pitchFamily="34" charset="-120"/>
-              </a:rPr>
-              <a:t>61%</a:t>
+                  <a:srgbClr val="94A3B8"/>
+                </a:solidFill>
+                <a:latin typeface="Arial" pitchFamily="34" charset="0"/>
+                <a:ea typeface="Arial" pitchFamily="34" charset="-122"/>
+                <a:cs typeface="Arial" pitchFamily="34" charset="-120"/>
+              </a:rPr>
+              <a:t>13%</a:t>
             </a:r>
             <a:endParaRPr lang="en-US" sz="2000" dirty="0"/>
           </a:p>
@@ -5971,7 +6127,7 @@
                 <a:ea typeface="Arial" pitchFamily="34" charset="-122"/>
                 <a:cs typeface="Arial" pitchFamily="34" charset="-120"/>
               </a:rPr>
-              <a:t>创历史新高，持续提升</a:t>
+              <a:t>部分HPC及汽车芯片</a:t>
             </a:r>
             <a:endParaRPr lang="en-US" sz="950" dirty="0"/>
           </a:p>
@@ -6024,6 +6180,180 @@
             <a:avLst/>
           </a:prstGeom>
           <a:solidFill>
+            <a:srgbClr val="6366F1"/>
+          </a:solidFill>
+          <a:ln w="12700">
+            <a:solidFill>
+              <a:srgbClr val="6366F1"/>
+            </a:solidFill>
+            <a:prstDash val="solid"/>
+          </a:ln>
+        </p:spPr>
+      </p:sp>
+      <p:sp>
+        <p:nvSpPr>
+          <p:cNvPr id="23" name="Text 20"/>
+          <p:cNvSpPr/>
+          <p:nvPr/>
+        </p:nvSpPr>
+        <p:spPr>
+          <a:xfrm>
+            <a:off x="5742432" y="3986784"/>
+            <a:ext cx="2194560" cy="292608"/>
+          </a:xfrm>
+          <a:prstGeom prst="rect">
+            <a:avLst/>
+          </a:prstGeom>
+          <a:noFill/>
+          <a:ln/>
+        </p:spPr>
+        <p:txBody>
+          <a:bodyPr wrap="square" lIns="0" tIns="0" rIns="0" bIns="0" rtlCol="0" anchor="ctr"/>
+          <a:lstStyle/>
+          <a:p>
+            <a:pPr indent="0" marL="0">
+              <a:buNone/>
+            </a:pPr>
+            <a:r>
+              <a:rPr lang="en-US" sz="1100" b="1" dirty="0">
+                <a:solidFill>
+                  <a:srgbClr val="1E293B"/>
+                </a:solidFill>
+                <a:latin typeface="Arial" pitchFamily="34" charset="0"/>
+                <a:ea typeface="Arial" pitchFamily="34" charset="-122"/>
+                <a:cs typeface="Arial" pitchFamily="34" charset="-120"/>
+              </a:rPr>
+              <a:t>先进制程合计（≤7nm）</a:t>
+            </a:r>
+            <a:endParaRPr lang="en-US" sz="1100" dirty="0"/>
+          </a:p>
+        </p:txBody>
+      </p:sp>
+      <p:sp>
+        <p:nvSpPr>
+          <p:cNvPr id="24" name="Text 21"/>
+          <p:cNvSpPr/>
+          <p:nvPr/>
+        </p:nvSpPr>
+        <p:spPr>
+          <a:xfrm>
+            <a:off x="8001000" y="3968496"/>
+            <a:ext cx="777240" cy="347472"/>
+          </a:xfrm>
+          <a:prstGeom prst="rect">
+            <a:avLst/>
+          </a:prstGeom>
+          <a:noFill/>
+          <a:ln/>
+        </p:spPr>
+        <p:txBody>
+          <a:bodyPr wrap="square" lIns="0" tIns="0" rIns="0" bIns="0" rtlCol="0" anchor="ctr"/>
+          <a:lstStyle/>
+          <a:p>
+            <a:pPr algn="ctr" indent="0" marL="0">
+              <a:buNone/>
+            </a:pPr>
+            <a:r>
+              <a:rPr lang="en-US" sz="2000" b="1" dirty="0">
+                <a:solidFill>
+                  <a:srgbClr val="6366F1"/>
+                </a:solidFill>
+                <a:latin typeface="Arial" pitchFamily="34" charset="0"/>
+                <a:ea typeface="Arial" pitchFamily="34" charset="-122"/>
+                <a:cs typeface="Arial" pitchFamily="34" charset="-120"/>
+              </a:rPr>
+              <a:t>74%</a:t>
+            </a:r>
+            <a:endParaRPr lang="en-US" sz="2000" dirty="0"/>
+          </a:p>
+        </p:txBody>
+      </p:sp>
+      <p:sp>
+        <p:nvSpPr>
+          <p:cNvPr id="25" name="Text 22"/>
+          <p:cNvSpPr/>
+          <p:nvPr/>
+        </p:nvSpPr>
+        <p:spPr>
+          <a:xfrm>
+            <a:off x="5742432" y="4453128"/>
+            <a:ext cx="3017520" cy="256032"/>
+          </a:xfrm>
+          <a:prstGeom prst="rect">
+            <a:avLst/>
+          </a:prstGeom>
+          <a:noFill/>
+          <a:ln/>
+        </p:spPr>
+        <p:txBody>
+          <a:bodyPr wrap="square" lIns="0" tIns="0" rIns="0" bIns="0" rtlCol="0" anchor="ctr"/>
+          <a:lstStyle/>
+          <a:p>
+            <a:pPr indent="0" marL="0">
+              <a:buNone/>
+            </a:pPr>
+            <a:r>
+              <a:rPr lang="en-US" sz="950" dirty="0">
+                <a:solidFill>
+                  <a:srgbClr val="94A3B8"/>
+                </a:solidFill>
+                <a:latin typeface="Arial" pitchFamily="34" charset="0"/>
+                <a:ea typeface="Arial" pitchFamily="34" charset="-122"/>
+                <a:cs typeface="Arial" pitchFamily="34" charset="-120"/>
+              </a:rPr>
+              <a:t>创历史新高，持续提升</a:t>
+            </a:r>
+            <a:endParaRPr lang="en-US" sz="950" dirty="0"/>
+          </a:p>
+        </p:txBody>
+      </p:sp>
+      <p:sp>
+        <p:nvSpPr>
+          <p:cNvPr id="26" name="Shape 23"/>
+          <p:cNvSpPr/>
+          <p:nvPr/>
+        </p:nvSpPr>
+        <p:spPr>
+          <a:xfrm>
+            <a:off x="5577840" y="4910328"/>
+            <a:ext cx="3291840" cy="868680"/>
+          </a:xfrm>
+          <a:prstGeom prst="rect">
+            <a:avLst/>
+          </a:prstGeom>
+          <a:solidFill>
+            <a:srgbClr val="F5F7FA"/>
+          </a:solidFill>
+          <a:ln w="12700">
+            <a:solidFill>
+              <a:srgbClr val="E2E8F0"/>
+            </a:solidFill>
+            <a:prstDash val="solid"/>
+          </a:ln>
+          <a:effectLst>
+            <a:outerShdw sx="100000" sy="100000" kx="0" ky="0" algn="bl" rotWithShape="0" blurRad="101600" dist="38100" dir="8100000">
+              <a:srgbClr val="000000">
+                <a:alpha val="10000"/>
+              </a:srgbClr>
+            </a:outerShdw>
+          </a:effectLst>
+        </p:spPr>
+      </p:sp>
+      <p:sp>
+        <p:nvSpPr>
+          <p:cNvPr id="27" name="Shape 24"/>
+          <p:cNvSpPr/>
+          <p:nvPr/>
+        </p:nvSpPr>
+        <p:spPr>
+          <a:xfrm>
+            <a:off x="5577840" y="4910328"/>
+            <a:ext cx="64008" cy="868680"/>
+          </a:xfrm>
+          <a:prstGeom prst="rect">
+            <a:avLst/>
+          </a:prstGeom>
+          <a:solidFill>
             <a:srgbClr val="F59E0B"/>
           </a:solidFill>
           <a:ln w="12700">
@@ -6036,13 +6366,13 @@
       </p:sp>
       <p:sp>
         <p:nvSpPr>
-          <p:cNvPr id="23" name="Text 20"/>
-          <p:cNvSpPr/>
-          <p:nvPr/>
-        </p:nvSpPr>
-        <p:spPr>
-          <a:xfrm>
-            <a:off x="5742432" y="3986784"/>
+          <p:cNvPr id="28" name="Text 25"/>
+          <p:cNvSpPr/>
+          <p:nvPr/>
+        </p:nvSpPr>
+        <p:spPr>
+          <a:xfrm>
+            <a:off x="5742432" y="4974336"/>
             <a:ext cx="2194560" cy="292608"/>
           </a:xfrm>
           <a:prstGeom prst="rect">
@@ -6075,13 +6405,13 @@
       </p:sp>
       <p:sp>
         <p:nvSpPr>
-          <p:cNvPr id="24" name="Text 21"/>
-          <p:cNvSpPr/>
-          <p:nvPr/>
-        </p:nvSpPr>
-        <p:spPr>
-          <a:xfrm>
-            <a:off x="8001000" y="3968496"/>
+          <p:cNvPr id="29" name="Text 26"/>
+          <p:cNvSpPr/>
+          <p:nvPr/>
+        </p:nvSpPr>
+        <p:spPr>
+          <a:xfrm>
+            <a:off x="8001000" y="4956048"/>
             <a:ext cx="777240" cy="347472"/>
           </a:xfrm>
           <a:prstGeom prst="rect">
@@ -6114,13 +6444,13 @@
       </p:sp>
       <p:sp>
         <p:nvSpPr>
-          <p:cNvPr id="25" name="Text 22"/>
-          <p:cNvSpPr/>
-          <p:nvPr/>
-        </p:nvSpPr>
-        <p:spPr>
-          <a:xfrm>
-            <a:off x="5742432" y="4453128"/>
+          <p:cNvPr id="30" name="Text 27"/>
+          <p:cNvSpPr/>
+          <p:nvPr/>
+        </p:nvSpPr>
+        <p:spPr>
+          <a:xfrm>
+            <a:off x="5742432" y="5440680"/>
             <a:ext cx="3017520" cy="256032"/>
           </a:xfrm>
           <a:prstGeom prst="rect">
@@ -6406,7 +6736,7 @@
                 <a:ea typeface="Arial" pitchFamily="34" charset="-122"/>
                 <a:cs typeface="Arial" pitchFamily="34" charset="-120"/>
               </a:rPr>
-              <a:t>$122.3B</a:t>
+              <a:t>$121.91B</a:t>
             </a:r>
             <a:endParaRPr lang="en-US" sz="1600" dirty="0"/>
           </a:p>
@@ -6445,7 +6775,7 @@
                 <a:ea typeface="Arial" pitchFamily="34" charset="-122"/>
                 <a:cs typeface="Arial" pitchFamily="34" charset="-120"/>
               </a:rPr>
-              <a:t>+38.5%  AI驱动历史新高</a:t>
+              <a:t>+37.99%  AI驱动突破千亿</a:t>
             </a:r>
             <a:endParaRPr lang="en-US" sz="850" dirty="0"/>
           </a:p>
@@ -6555,7 +6885,7 @@
                 <a:ea typeface="Arial" pitchFamily="34" charset="-122"/>
                 <a:cs typeface="Arial" pitchFamily="34" charset="-120"/>
               </a:rPr>
-              <a:t>$88.3B</a:t>
+              <a:t>$88.34B</a:t>
             </a:r>
             <a:endParaRPr lang="en-US" sz="1600" dirty="0"/>
           </a:p>
@@ -6594,7 +6924,7 @@
                 <a:ea typeface="Arial" pitchFamily="34" charset="-122"/>
                 <a:cs typeface="Arial" pitchFamily="34" charset="-120"/>
               </a:rPr>
-              <a:t>+25.4%  AI基础设施需求</a:t>
+              <a:t>+25.40%  AI基础设施需求</a:t>
             </a:r>
             <a:endParaRPr lang="en-US" sz="850" dirty="0"/>
           </a:p>
@@ -6743,7 +7073,7 @@
                 <a:ea typeface="Arial" pitchFamily="34" charset="-122"/>
                 <a:cs typeface="Arial" pitchFamily="34" charset="-120"/>
               </a:rPr>
-              <a:t>+40.6%  连续四季创历史高</a:t>
+              <a:t>+40.6%  连续四季创新高</a:t>
             </a:r>
             <a:endParaRPr lang="en-US" sz="850" dirty="0"/>
           </a:p>
